--- a/Documentation/vaari-ppt.pptx
+++ b/Documentation/vaari-ppt.pptx
@@ -309,7 +309,7 @@
           <a:p>
             <a:fld id="{5BCAD085-E8A6-8845-BD4E-CB4CCA059FC4}" type="datetimeFigureOut">
               <a:rPr lang="en-US" smtClean="0"/>
-              <a:t>5/21/2026</a:t>
+              <a:t>5/22/2026</a:t>
             </a:fld>
             <a:endParaRPr lang="en-US"/>
           </a:p>
@@ -477,7 +477,7 @@
           <a:p>
             <a:fld id="{5BCAD085-E8A6-8845-BD4E-CB4CCA059FC4}" type="datetimeFigureOut">
               <a:rPr lang="en-US" smtClean="0"/>
-              <a:t>5/21/2026</a:t>
+              <a:t>5/22/2026</a:t>
             </a:fld>
             <a:endParaRPr lang="en-US"/>
           </a:p>
@@ -655,7 +655,7 @@
           <a:p>
             <a:fld id="{5BCAD085-E8A6-8845-BD4E-CB4CCA059FC4}" type="datetimeFigureOut">
               <a:rPr lang="en-US" smtClean="0"/>
-              <a:t>5/21/2026</a:t>
+              <a:t>5/22/2026</a:t>
             </a:fld>
             <a:endParaRPr lang="en-US"/>
           </a:p>
@@ -823,7 +823,7 @@
           <a:p>
             <a:fld id="{5BCAD085-E8A6-8845-BD4E-CB4CCA059FC4}" type="datetimeFigureOut">
               <a:rPr lang="en-US" smtClean="0"/>
-              <a:t>5/21/2026</a:t>
+              <a:t>5/22/2026</a:t>
             </a:fld>
             <a:endParaRPr lang="en-US"/>
           </a:p>
@@ -1068,7 +1068,7 @@
           <a:p>
             <a:fld id="{5BCAD085-E8A6-8845-BD4E-CB4CCA059FC4}" type="datetimeFigureOut">
               <a:rPr lang="en-US" smtClean="0"/>
-              <a:t>5/21/2026</a:t>
+              <a:t>5/22/2026</a:t>
             </a:fld>
             <a:endParaRPr lang="en-US"/>
           </a:p>
@@ -1353,7 +1353,7 @@
           <a:p>
             <a:fld id="{5BCAD085-E8A6-8845-BD4E-CB4CCA059FC4}" type="datetimeFigureOut">
               <a:rPr lang="en-US" smtClean="0"/>
-              <a:t>5/21/2026</a:t>
+              <a:t>5/22/2026</a:t>
             </a:fld>
             <a:endParaRPr lang="en-US"/>
           </a:p>
@@ -1772,7 +1772,7 @@
           <a:p>
             <a:fld id="{5BCAD085-E8A6-8845-BD4E-CB4CCA059FC4}" type="datetimeFigureOut">
               <a:rPr lang="en-US" smtClean="0"/>
-              <a:t>5/21/2026</a:t>
+              <a:t>5/22/2026</a:t>
             </a:fld>
             <a:endParaRPr lang="en-US"/>
           </a:p>
@@ -1889,7 +1889,7 @@
           <a:p>
             <a:fld id="{5BCAD085-E8A6-8845-BD4E-CB4CCA059FC4}" type="datetimeFigureOut">
               <a:rPr lang="en-US" smtClean="0"/>
-              <a:t>5/21/2026</a:t>
+              <a:t>5/22/2026</a:t>
             </a:fld>
             <a:endParaRPr lang="en-US"/>
           </a:p>
@@ -1984,7 +1984,7 @@
           <a:p>
             <a:fld id="{5BCAD085-E8A6-8845-BD4E-CB4CCA059FC4}" type="datetimeFigureOut">
               <a:rPr lang="en-US" smtClean="0"/>
-              <a:t>5/21/2026</a:t>
+              <a:t>5/22/2026</a:t>
             </a:fld>
             <a:endParaRPr lang="en-US"/>
           </a:p>
@@ -2259,7 +2259,7 @@
           <a:p>
             <a:fld id="{5BCAD085-E8A6-8845-BD4E-CB4CCA059FC4}" type="datetimeFigureOut">
               <a:rPr lang="en-US" smtClean="0"/>
-              <a:t>5/21/2026</a:t>
+              <a:t>5/22/2026</a:t>
             </a:fld>
             <a:endParaRPr lang="en-US"/>
           </a:p>
@@ -2511,7 +2511,7 @@
           <a:p>
             <a:fld id="{5BCAD085-E8A6-8845-BD4E-CB4CCA059FC4}" type="datetimeFigureOut">
               <a:rPr lang="en-US" smtClean="0"/>
-              <a:t>5/21/2026</a:t>
+              <a:t>5/22/2026</a:t>
             </a:fld>
             <a:endParaRPr lang="en-US"/>
           </a:p>
@@ -2722,7 +2722,7 @@
           <a:p>
             <a:fld id="{5BCAD085-E8A6-8845-BD4E-CB4CCA059FC4}" type="datetimeFigureOut">
               <a:rPr lang="en-US" smtClean="0"/>
-              <a:t>5/21/2026</a:t>
+              <a:t>5/22/2026</a:t>
             </a:fld>
             <a:endParaRPr lang="en-US"/>
           </a:p>
@@ -3261,7 +3261,7 @@
           <a:p>
             <a:pPr algn="ctr"/>
             <a:r>
-              <a:rPr sz="7200" b="1" i="0">
+              <a:rPr sz="7200" b="1" i="0" dirty="0">
                 <a:solidFill>
                   <a:srgbClr val="3D355E"/>
                 </a:solidFill>
@@ -3329,7 +3329,7 @@
           <a:p>
             <a:pPr algn="ctr"/>
             <a:r>
-              <a:rPr sz="1600" b="0" i="0">
+              <a:rPr sz="1600" b="0" i="0" dirty="0">
                 <a:solidFill>
                   <a:srgbClr val="6B5F9E"/>
                 </a:solidFill>
@@ -3649,8 +3649,8 @@
         </p:nvSpPr>
         <p:spPr>
           <a:xfrm>
-            <a:off x="548640" y="1371600"/>
-            <a:ext cx="10972800" cy="5029200"/>
+            <a:off x="137160" y="1207008"/>
+            <a:ext cx="6021044" cy="5554726"/>
           </a:xfrm>
           <a:prstGeom prst="rect">
             <a:avLst/>
@@ -3663,9 +3663,13 @@
           </a:bodyPr>
           <a:lstStyle/>
           <a:p>
-            <a:pPr algn="l"/>
-            <a:r>
-              <a:rPr sz="1800" dirty="0">
+            <a:pPr algn="l">
+              <a:lnSpc>
+                <a:spcPct val="200000"/>
+              </a:lnSpc>
+            </a:pPr>
+            <a:r>
+              <a:rPr dirty="0">
                 <a:solidFill>
                   <a:srgbClr val="3D355E"/>
                 </a:solidFill>
@@ -3674,9 +3678,13 @@
             </a:r>
           </a:p>
           <a:p>
-            <a:pPr algn="l"/>
-            <a:r>
-              <a:rPr sz="1800" dirty="0">
+            <a:pPr algn="l">
+              <a:lnSpc>
+                <a:spcPct val="200000"/>
+              </a:lnSpc>
+            </a:pPr>
+            <a:r>
+              <a:rPr dirty="0">
                 <a:solidFill>
                   <a:srgbClr val="3D355E"/>
                 </a:solidFill>
@@ -3684,7 +3692,15 @@
               <a:t>  •  Search crops by name and view their water footprint in </a:t>
             </a:r>
             <a:r>
-              <a:rPr sz="1800" dirty="0" err="1">
+              <a:rPr lang="en-IN" dirty="0">
+                <a:solidFill>
+                  <a:srgbClr val="3D355E"/>
+                </a:solidFill>
+              </a:rPr>
+              <a:t>	</a:t>
+            </a:r>
+            <a:r>
+              <a:rPr dirty="0" err="1">
                 <a:solidFill>
                   <a:srgbClr val="3D355E"/>
                 </a:solidFill>
@@ -3692,7 +3708,7 @@
               <a:t>litres</a:t>
             </a:r>
             <a:r>
-              <a:rPr sz="1800" dirty="0">
+              <a:rPr dirty="0">
                 <a:solidFill>
                   <a:srgbClr val="3D355E"/>
                 </a:solidFill>
@@ -3701,20 +3717,60 @@
             </a:r>
           </a:p>
           <a:p>
-            <a:pPr algn="l"/>
-            <a:r>
-              <a:rPr sz="1800" dirty="0">
+            <a:pPr algn="l">
+              <a:lnSpc>
+                <a:spcPct val="200000"/>
+              </a:lnSpc>
+            </a:pPr>
+            <a:r>
+              <a:rPr dirty="0">
                 <a:solidFill>
                   <a:srgbClr val="3D355E"/>
                 </a:solidFill>
               </a:rPr>
-              <a:t>  •  Displays Green, Blue, and Grey water breakdown with a Pie Chart</a:t>
-            </a:r>
-          </a:p>
-          <a:p>
-            <a:pPr algn="l"/>
-            <a:r>
-              <a:rPr sz="1800" dirty="0">
+              <a:t>  •  Displays Green, Blue, </a:t>
+            </a:r>
+            <a:r>
+              <a:rPr sz="1600" dirty="0">
+                <a:solidFill>
+                  <a:srgbClr val="3D355E"/>
+                </a:solidFill>
+              </a:rPr>
+              <a:t>and</a:t>
+            </a:r>
+            <a:r>
+              <a:rPr dirty="0">
+                <a:solidFill>
+                  <a:srgbClr val="3D355E"/>
+                </a:solidFill>
+              </a:rPr>
+              <a:t> Grey water breakdown with a Pie </a:t>
+            </a:r>
+            <a:r>
+              <a:rPr lang="en-IN" dirty="0">
+                <a:solidFill>
+                  <a:srgbClr val="3D355E"/>
+                </a:solidFill>
+              </a:rPr>
+              <a:t>	</a:t>
+            </a:r>
+            <a:r>
+              <a:rPr dirty="0">
+                <a:solidFill>
+                  <a:srgbClr val="3D355E"/>
+                </a:solidFill>
+              </a:rPr>
+              <a:t>Chart</a:t>
+            </a:r>
+          </a:p>
+          <a:p>
+            <a:pPr algn="l">
+              <a:lnSpc>
+                <a:spcPct val="200000"/>
+              </a:lnSpc>
+            </a:pPr>
+            <a:r>
+              <a:rPr dirty="0">
                 <a:solidFill>
                   <a:srgbClr val="3D355E"/>
                 </a:solidFill>
@@ -3723,29 +3779,98 @@
             </a:r>
           </a:p>
           <a:p>
-            <a:pPr algn="l"/>
-            <a:r>
-              <a:rPr sz="1800" dirty="0">
+            <a:pPr algn="l">
+              <a:lnSpc>
+                <a:spcPct val="200000"/>
+              </a:lnSpc>
+            </a:pPr>
+            <a:r>
+              <a:rPr dirty="0">
                 <a:solidFill>
                   <a:srgbClr val="3D355E"/>
                 </a:solidFill>
               </a:rPr>
-              <a:t>  •  Supports 11 Indian languages (Hindi, Bengali, Tamil, Telugu and more)</a:t>
-            </a:r>
-          </a:p>
-          <a:p>
-            <a:pPr algn="l"/>
-            <a:r>
-              <a:rPr sz="1800" dirty="0">
+              <a:t>  •  Supports 11 Indian languages (Hindi, Bengali, Tamil, Telugu </a:t>
+            </a:r>
+            <a:r>
+              <a:rPr lang="en-IN" dirty="0">
                 <a:solidFill>
                   <a:srgbClr val="3D355E"/>
                 </a:solidFill>
               </a:rPr>
-              <a:t>  •  Backend powered by a Python / Flask REST API with crop dataset</a:t>
-            </a:r>
-          </a:p>
-        </p:txBody>
-      </p:sp>
+              <a:t>	</a:t>
+            </a:r>
+            <a:r>
+              <a:rPr dirty="0">
+                <a:solidFill>
+                  <a:srgbClr val="3D355E"/>
+                </a:solidFill>
+              </a:rPr>
+              <a:t>and more)</a:t>
+            </a:r>
+          </a:p>
+          <a:p>
+            <a:pPr algn="l">
+              <a:lnSpc>
+                <a:spcPct val="200000"/>
+              </a:lnSpc>
+            </a:pPr>
+            <a:r>
+              <a:rPr dirty="0">
+                <a:solidFill>
+                  <a:srgbClr val="3D355E"/>
+                </a:solidFill>
+              </a:rPr>
+              <a:t>  •  Backend powered by a Python / Flask REST API with crop </a:t>
+            </a:r>
+            <a:r>
+              <a:rPr lang="en-IN" dirty="0">
+                <a:solidFill>
+                  <a:srgbClr val="3D355E"/>
+                </a:solidFill>
+              </a:rPr>
+              <a:t>	</a:t>
+            </a:r>
+            <a:r>
+              <a:rPr dirty="0">
+                <a:solidFill>
+                  <a:srgbClr val="3D355E"/>
+                </a:solidFill>
+              </a:rPr>
+              <a:t>dataset</a:t>
+            </a:r>
+          </a:p>
+        </p:txBody>
+      </p:sp>
+      <p:pic>
+        <p:nvPicPr>
+          <p:cNvPr id="8" name="Picture 7">
+            <a:extLst>
+              <a:ext uri="{FF2B5EF4-FFF2-40B4-BE49-F238E27FC236}">
+                <a16:creationId xmlns:a16="http://schemas.microsoft.com/office/drawing/2014/main" id="{3C138A79-8C97-CCCF-FF63-F283CAB65A85}"/>
+              </a:ext>
+            </a:extLst>
+          </p:cNvPr>
+          <p:cNvPicPr>
+            <a:picLocks noChangeAspect="1"/>
+          </p:cNvPicPr>
+          <p:nvPr/>
+        </p:nvPicPr>
+        <p:blipFill>
+          <a:blip r:embed="rId2"/>
+          <a:srcRect l="48074" t="8527" r="1967" b="51564"/>
+          <a:stretch/>
+        </p:blipFill>
+        <p:spPr>
+          <a:xfrm>
+            <a:off x="6133462" y="1581538"/>
+            <a:ext cx="5981994" cy="3904862"/>
+          </a:xfrm>
+          <a:prstGeom prst="rect">
+            <a:avLst/>
+          </a:prstGeom>
+        </p:spPr>
+      </p:pic>
     </p:spTree>
   </p:cSld>
   <p:clrMapOvr>
@@ -4222,14 +4347,20 @@
       </p:sp>
       <p:sp>
         <p:nvSpPr>
-          <p:cNvPr id="6" name="TextBox 5"/>
+          <p:cNvPr id="7" name="TextBox 6">
+            <a:extLst>
+              <a:ext uri="{FF2B5EF4-FFF2-40B4-BE49-F238E27FC236}">
+                <a16:creationId xmlns:a16="http://schemas.microsoft.com/office/drawing/2014/main" id="{814F2021-A762-F398-E1F5-B46A2D7849E2}"/>
+              </a:ext>
+            </a:extLst>
+          </p:cNvPr>
           <p:cNvSpPr txBox="1"/>
           <p:nvPr/>
         </p:nvSpPr>
         <p:spPr>
           <a:xfrm>
-            <a:off x="548640" y="1371600"/>
-            <a:ext cx="10972800" cy="5029200"/>
+            <a:off x="137160" y="1207008"/>
+            <a:ext cx="5517191" cy="5554726"/>
           </a:xfrm>
           <a:prstGeom prst="rect">
             <a:avLst/>
@@ -4242,62 +4373,116 @@
           </a:bodyPr>
           <a:lstStyle/>
           <a:p>
-            <a:pPr algn="l"/>
-            <a:r>
-              <a:rPr sz="1800">
+            <a:pPr algn="l">
+              <a:lnSpc>
+                <a:spcPct val="200000"/>
+              </a:lnSpc>
+            </a:pPr>
+            <a:r>
+              <a:rPr lang="en-US" dirty="0">
                 <a:solidFill>
                   <a:srgbClr val="3D355E"/>
                 </a:solidFill>
               </a:rPr>
-              <a:t>  •  Agriculture consumes ~70% of global freshwater resources</a:t>
-            </a:r>
-          </a:p>
-          <a:p>
-            <a:pPr algn="l"/>
-            <a:r>
-              <a:rPr sz="1800">
+              <a:t>•  Agriculture consumes ~70% of global freshwater 	resources  </a:t>
+            </a:r>
+          </a:p>
+          <a:p>
+            <a:pPr algn="l">
+              <a:lnSpc>
+                <a:spcPct val="200000"/>
+              </a:lnSpc>
+            </a:pPr>
+            <a:r>
+              <a:rPr lang="en-US" dirty="0">
                 <a:solidFill>
                   <a:srgbClr val="3D355E"/>
                 </a:solidFill>
               </a:rPr>
-              <a:t>  •  Farmers and students lack easy access to crop water-use data</a:t>
-            </a:r>
-          </a:p>
-          <a:p>
-            <a:pPr algn="l"/>
-            <a:r>
-              <a:rPr sz="1800">
+              <a:t>•  Farmers and students lack easy access to 	crop water-	use data  </a:t>
+            </a:r>
+          </a:p>
+          <a:p>
+            <a:pPr algn="l">
+              <a:lnSpc>
+                <a:spcPct val="200000"/>
+              </a:lnSpc>
+            </a:pPr>
+            <a:r>
+              <a:rPr lang="en-US" dirty="0">
                 <a:solidFill>
                   <a:srgbClr val="3D355E"/>
                 </a:solidFill>
               </a:rPr>
-              <a:t>  •  Existing tools are complex, web-only, or require technical expertise</a:t>
-            </a:r>
-          </a:p>
-          <a:p>
-            <a:pPr algn="l"/>
-            <a:r>
-              <a:rPr sz="1800">
+              <a:t>•  Existing tools are complex, web-only, or require 	technical 	expertise  </a:t>
+            </a:r>
+          </a:p>
+          <a:p>
+            <a:pPr algn="l">
+              <a:lnSpc>
+                <a:spcPct val="200000"/>
+              </a:lnSpc>
+            </a:pPr>
+            <a:r>
+              <a:rPr lang="en-US" dirty="0">
                 <a:solidFill>
                   <a:srgbClr val="3D355E"/>
                 </a:solidFill>
               </a:rPr>
-              <a:t>  •  No simple multilingual mobile solution for Indian crop water footprints</a:t>
-            </a:r>
-          </a:p>
-          <a:p>
-            <a:pPr algn="l"/>
-            <a:r>
-              <a:rPr sz="1800">
+              <a:t>•  No simple multilingual mobile solution for Indian crop 	water footprints  </a:t>
+            </a:r>
+          </a:p>
+          <a:p>
+            <a:pPr algn="l">
+              <a:lnSpc>
+                <a:spcPct val="200000"/>
+              </a:lnSpc>
+            </a:pPr>
+            <a:r>
+              <a:rPr lang="en-US" dirty="0">
                 <a:solidFill>
                   <a:srgbClr val="3D355E"/>
                 </a:solidFill>
               </a:rPr>
-              <a:t>  •  Water scarcity awareness is critically low among rural and semi-urban users</a:t>
-            </a:r>
-          </a:p>
-        </p:txBody>
-      </p:sp>
+              <a:t>•  Water scarcity awareness is critically low among rural 	and 	semi-urban users</a:t>
+            </a:r>
+            <a:endParaRPr dirty="0">
+              <a:solidFill>
+                <a:srgbClr val="3D355E"/>
+              </a:solidFill>
+            </a:endParaRPr>
+          </a:p>
+        </p:txBody>
+      </p:sp>
+      <p:pic>
+        <p:nvPicPr>
+          <p:cNvPr id="9" name="Picture 8">
+            <a:extLst>
+              <a:ext uri="{FF2B5EF4-FFF2-40B4-BE49-F238E27FC236}">
+                <a16:creationId xmlns:a16="http://schemas.microsoft.com/office/drawing/2014/main" id="{36D4B0C6-FDF4-D973-B047-9FA52527EF95}"/>
+              </a:ext>
+            </a:extLst>
+          </p:cNvPr>
+          <p:cNvPicPr>
+            <a:picLocks noChangeAspect="1"/>
+          </p:cNvPicPr>
+          <p:nvPr/>
+        </p:nvPicPr>
+        <p:blipFill>
+          <a:blip r:embed="rId2"/>
+          <a:srcRect l="38113" t="53424" r="1888" b="2313"/>
+          <a:stretch/>
+        </p:blipFill>
+        <p:spPr>
+          <a:xfrm>
+            <a:off x="5668621" y="1903446"/>
+            <a:ext cx="6475751" cy="3582956"/>
+          </a:xfrm>
+          <a:prstGeom prst="rect">
+            <a:avLst/>
+          </a:prstGeom>
+        </p:spPr>
+      </p:pic>
     </p:spTree>
   </p:cSld>
   <p:clrMapOvr>
@@ -9461,8 +9646,8 @@
         </p:nvSpPr>
         <p:spPr>
           <a:xfrm>
-            <a:off x="457200" y="1371600"/>
-            <a:ext cx="2606040" cy="5029200"/>
+            <a:off x="457199" y="1240970"/>
+            <a:ext cx="3225283" cy="1309396"/>
           </a:xfrm>
           <a:prstGeom prst="rect">
             <a:avLst/>
@@ -9539,8 +9724,8 @@
         </p:nvSpPr>
         <p:spPr>
           <a:xfrm>
-            <a:off x="594360" y="2194560"/>
-            <a:ext cx="2377440" cy="3931920"/>
+            <a:off x="1689152" y="1549244"/>
+            <a:ext cx="9706636" cy="954107"/>
           </a:xfrm>
           <a:prstGeom prst="rect">
             <a:avLst/>
@@ -9555,7 +9740,7 @@
           <a:p>
             <a:pPr algn="l"/>
             <a:r>
-              <a:rPr sz="1400" b="0" i="0">
+              <a:rPr sz="1400" b="0" i="0" dirty="0">
                 <a:solidFill>
                   <a:srgbClr val="6B5F9E"/>
                 </a:solidFill>
@@ -9576,8 +9761,8 @@
         </p:nvSpPr>
         <p:spPr>
           <a:xfrm>
-            <a:off x="3291840" y="1371600"/>
-            <a:ext cx="2606040" cy="5029200"/>
+            <a:off x="457198" y="2675971"/>
+            <a:ext cx="3225283" cy="1155803"/>
           </a:xfrm>
           <a:prstGeom prst="rect">
             <a:avLst/>
@@ -9620,7 +9805,7 @@
         </p:nvSpPr>
         <p:spPr>
           <a:xfrm>
-            <a:off x="3429000" y="1508760"/>
+            <a:off x="594360" y="2931704"/>
             <a:ext cx="2377440" cy="548640"/>
           </a:xfrm>
           <a:prstGeom prst="rect">
@@ -9636,7 +9821,7 @@
           <a:p>
             <a:pPr algn="l"/>
             <a:r>
-              <a:rPr sz="1600" b="1" i="0">
+              <a:rPr sz="1600" b="1" i="0" dirty="0">
                 <a:solidFill>
                   <a:srgbClr val="3D355E"/>
                 </a:solidFill>
@@ -9654,7 +9839,7 @@
         </p:nvSpPr>
         <p:spPr>
           <a:xfrm>
-            <a:off x="3429000" y="2194560"/>
+            <a:off x="1689152" y="2909596"/>
             <a:ext cx="2377440" cy="3931920"/>
           </a:xfrm>
           <a:prstGeom prst="rect">
@@ -9670,7 +9855,7 @@
           <a:p>
             <a:pPr algn="l"/>
             <a:r>
-              <a:rPr sz="1400" b="0" i="0">
+              <a:rPr sz="1400" b="0" i="0" dirty="0">
                 <a:solidFill>
                   <a:srgbClr val="6B5F9E"/>
                 </a:solidFill>
@@ -9691,8 +9876,8 @@
         </p:nvSpPr>
         <p:spPr>
           <a:xfrm>
-            <a:off x="6149340" y="1371600"/>
-            <a:ext cx="2606040" cy="5029200"/>
+            <a:off x="457198" y="3930573"/>
+            <a:ext cx="3225284" cy="1177575"/>
           </a:xfrm>
           <a:prstGeom prst="rect">
             <a:avLst/>
@@ -9735,7 +9920,7 @@
         </p:nvSpPr>
         <p:spPr>
           <a:xfrm>
-            <a:off x="6263640" y="1508760"/>
+            <a:off x="546152" y="4239519"/>
             <a:ext cx="2377440" cy="548640"/>
           </a:xfrm>
           <a:prstGeom prst="rect">
@@ -9751,7 +9936,7 @@
           <a:p>
             <a:pPr algn="l"/>
             <a:r>
-              <a:rPr sz="1600" b="1" i="0">
+              <a:rPr sz="1600" b="1" i="0" dirty="0">
                 <a:solidFill>
                   <a:srgbClr val="3D355E"/>
                 </a:solidFill>
@@ -9769,7 +9954,7 @@
         </p:nvSpPr>
         <p:spPr>
           <a:xfrm>
-            <a:off x="6263640" y="2194560"/>
+            <a:off x="1689152" y="4036322"/>
             <a:ext cx="2377440" cy="3931920"/>
           </a:xfrm>
           <a:prstGeom prst="rect">
@@ -9785,7 +9970,7 @@
           <a:p>
             <a:pPr algn="l"/>
             <a:r>
-              <a:rPr sz="1400" b="0" i="0">
+              <a:rPr sz="1400" b="0" i="0" dirty="0">
                 <a:solidFill>
                   <a:srgbClr val="6B5F9E"/>
                 </a:solidFill>
@@ -9806,8 +9991,8 @@
         </p:nvSpPr>
         <p:spPr>
           <a:xfrm>
-            <a:off x="8961120" y="1371600"/>
-            <a:ext cx="2606040" cy="5029200"/>
+            <a:off x="457199" y="5271438"/>
+            <a:ext cx="3225282" cy="1240402"/>
           </a:xfrm>
           <a:prstGeom prst="rect">
             <a:avLst/>
@@ -9850,7 +10035,7 @@
         </p:nvSpPr>
         <p:spPr>
           <a:xfrm>
-            <a:off x="9098280" y="1508760"/>
+            <a:off x="490012" y="5552954"/>
             <a:ext cx="2377440" cy="548640"/>
           </a:xfrm>
           <a:prstGeom prst="rect">
@@ -9866,7 +10051,7 @@
           <a:p>
             <a:pPr algn="l"/>
             <a:r>
-              <a:rPr sz="1600" b="1" i="0">
+              <a:rPr sz="1600" b="1" i="0" dirty="0">
                 <a:solidFill>
                   <a:srgbClr val="3D355E"/>
                 </a:solidFill>
@@ -9884,7 +10069,7 @@
         </p:nvSpPr>
         <p:spPr>
           <a:xfrm>
-            <a:off x="9098280" y="2194560"/>
+            <a:off x="1734872" y="5364745"/>
             <a:ext cx="2377440" cy="3931920"/>
           </a:xfrm>
           <a:prstGeom prst="rect">
@@ -9900,7 +10085,7 @@
           <a:p>
             <a:pPr algn="l"/>
             <a:r>
-              <a:rPr sz="1400" b="0" i="0">
+              <a:rPr sz="1400" b="0" i="0" dirty="0">
                 <a:solidFill>
                   <a:srgbClr val="6B5F9E"/>
                 </a:solidFill>
@@ -9913,6 +10098,126 @@
           </a:p>
         </p:txBody>
       </p:sp>
+      <p:pic>
+        <p:nvPicPr>
+          <p:cNvPr id="19" name="Picture 18">
+            <a:extLst>
+              <a:ext uri="{FF2B5EF4-FFF2-40B4-BE49-F238E27FC236}">
+                <a16:creationId xmlns:a16="http://schemas.microsoft.com/office/drawing/2014/main" id="{EA358AEA-5F30-6E46-3775-2B9E49473858}"/>
+              </a:ext>
+            </a:extLst>
+          </p:cNvPr>
+          <p:cNvPicPr>
+            <a:picLocks noChangeAspect="1"/>
+          </p:cNvPicPr>
+          <p:nvPr/>
+        </p:nvPicPr>
+        <p:blipFill>
+          <a:blip r:embed="rId2"/>
+          <a:stretch>
+            <a:fillRect/>
+          </a:stretch>
+        </p:blipFill>
+        <p:spPr>
+          <a:xfrm>
+            <a:off x="3856007" y="1355329"/>
+            <a:ext cx="1865401" cy="5349910"/>
+          </a:xfrm>
+          <a:prstGeom prst="rect">
+            <a:avLst/>
+          </a:prstGeom>
+        </p:spPr>
+      </p:pic>
+      <p:pic>
+        <p:nvPicPr>
+          <p:cNvPr id="21" name="Picture 20">
+            <a:extLst>
+              <a:ext uri="{FF2B5EF4-FFF2-40B4-BE49-F238E27FC236}">
+                <a16:creationId xmlns:a16="http://schemas.microsoft.com/office/drawing/2014/main" id="{7BB56B06-DB25-3B67-DB97-F32118DD0F18}"/>
+              </a:ext>
+            </a:extLst>
+          </p:cNvPr>
+          <p:cNvPicPr>
+            <a:picLocks noChangeAspect="1"/>
+          </p:cNvPicPr>
+          <p:nvPr/>
+        </p:nvPicPr>
+        <p:blipFill>
+          <a:blip r:embed="rId3"/>
+          <a:stretch>
+            <a:fillRect/>
+          </a:stretch>
+        </p:blipFill>
+        <p:spPr>
+          <a:xfrm>
+            <a:off x="5737066" y="1325544"/>
+            <a:ext cx="2083629" cy="5349911"/>
+          </a:xfrm>
+          <a:prstGeom prst="rect">
+            <a:avLst/>
+          </a:prstGeom>
+        </p:spPr>
+      </p:pic>
+      <p:pic>
+        <p:nvPicPr>
+          <p:cNvPr id="23" name="Picture 22">
+            <a:extLst>
+              <a:ext uri="{FF2B5EF4-FFF2-40B4-BE49-F238E27FC236}">
+                <a16:creationId xmlns:a16="http://schemas.microsoft.com/office/drawing/2014/main" id="{30B82CBD-DFF4-00A9-0E44-4228F47B9C4D}"/>
+              </a:ext>
+            </a:extLst>
+          </p:cNvPr>
+          <p:cNvPicPr>
+            <a:picLocks noChangeAspect="1"/>
+          </p:cNvPicPr>
+          <p:nvPr/>
+        </p:nvPicPr>
+        <p:blipFill>
+          <a:blip r:embed="rId4"/>
+          <a:stretch>
+            <a:fillRect/>
+          </a:stretch>
+        </p:blipFill>
+        <p:spPr>
+          <a:xfrm>
+            <a:off x="9926400" y="1380212"/>
+            <a:ext cx="2193415" cy="5361681"/>
+          </a:xfrm>
+          <a:prstGeom prst="rect">
+            <a:avLst/>
+          </a:prstGeom>
+        </p:spPr>
+      </p:pic>
+      <p:pic>
+        <p:nvPicPr>
+          <p:cNvPr id="25" name="Picture 24">
+            <a:extLst>
+              <a:ext uri="{FF2B5EF4-FFF2-40B4-BE49-F238E27FC236}">
+                <a16:creationId xmlns:a16="http://schemas.microsoft.com/office/drawing/2014/main" id="{39A17BF3-CBB4-5BD0-8A91-6BBB8B6FC57A}"/>
+              </a:ext>
+            </a:extLst>
+          </p:cNvPr>
+          <p:cNvPicPr>
+            <a:picLocks noChangeAspect="1"/>
+          </p:cNvPicPr>
+          <p:nvPr/>
+        </p:nvPicPr>
+        <p:blipFill>
+          <a:blip r:embed="rId5"/>
+          <a:stretch>
+            <a:fillRect/>
+          </a:stretch>
+        </p:blipFill>
+        <p:spPr>
+          <a:xfrm>
+            <a:off x="7775524" y="1380212"/>
+            <a:ext cx="2193415" cy="5361681"/>
+          </a:xfrm>
+          <a:prstGeom prst="rect">
+            <a:avLst/>
+          </a:prstGeom>
+        </p:spPr>
+      </p:pic>
     </p:spTree>
   </p:cSld>
   <p:clrMapOvr>
@@ -10760,7 +11065,7 @@
         <p:spPr>
           <a:xfrm>
             <a:off x="548640" y="1371600"/>
-            <a:ext cx="10972800" cy="4754880"/>
+            <a:ext cx="6990495" cy="1923604"/>
           </a:xfrm>
           <a:prstGeom prst="rect">
             <a:avLst/>
@@ -10885,6 +11190,64 @@
           </a:p>
         </p:txBody>
       </p:sp>
+      <p:pic>
+        <p:nvPicPr>
+          <p:cNvPr id="11" name="Picture 10">
+            <a:extLst>
+              <a:ext uri="{FF2B5EF4-FFF2-40B4-BE49-F238E27FC236}">
+                <a16:creationId xmlns:a16="http://schemas.microsoft.com/office/drawing/2014/main" id="{12307911-1297-D473-8FBA-1EF27A06CC83}"/>
+              </a:ext>
+            </a:extLst>
+          </p:cNvPr>
+          <p:cNvPicPr>
+            <a:picLocks noChangeAspect="1"/>
+          </p:cNvPicPr>
+          <p:nvPr/>
+        </p:nvPicPr>
+        <p:blipFill>
+          <a:blip r:embed="rId2"/>
+          <a:srcRect l="48914" t="3389" r="1390" b="23246"/>
+          <a:stretch/>
+        </p:blipFill>
+        <p:spPr>
+          <a:xfrm>
+            <a:off x="7657321" y="1484316"/>
+            <a:ext cx="3920077" cy="4340412"/>
+          </a:xfrm>
+          <a:prstGeom prst="rect">
+            <a:avLst/>
+          </a:prstGeom>
+        </p:spPr>
+      </p:pic>
+      <p:pic>
+        <p:nvPicPr>
+          <p:cNvPr id="13" name="Picture 12">
+            <a:extLst>
+              <a:ext uri="{FF2B5EF4-FFF2-40B4-BE49-F238E27FC236}">
+                <a16:creationId xmlns:a16="http://schemas.microsoft.com/office/drawing/2014/main" id="{272ADB91-2BB4-300F-764D-529F5B55D541}"/>
+              </a:ext>
+            </a:extLst>
+          </p:cNvPr>
+          <p:cNvPicPr>
+            <a:picLocks noChangeAspect="1"/>
+          </p:cNvPicPr>
+          <p:nvPr/>
+        </p:nvPicPr>
+        <p:blipFill>
+          <a:blip r:embed="rId2"/>
+          <a:srcRect l="2602" t="75102" r="2364" b="2667"/>
+          <a:stretch/>
+        </p:blipFill>
+        <p:spPr>
+          <a:xfrm>
+            <a:off x="401993" y="4149323"/>
+            <a:ext cx="6990495" cy="1226464"/>
+          </a:xfrm>
+          <a:prstGeom prst="rect">
+            <a:avLst/>
+          </a:prstGeom>
+        </p:spPr>
+      </p:pic>
     </p:spTree>
   </p:cSld>
   <p:clrMapOvr>
